--- a/dist/초5/수학/분수의덧셈과뺄셈/초5_수학_분수의덧셈과뺄셈_01_분모가다른분수의덧셈_학생용.pptx
+++ b/dist/초5/수학/분수의덧셈과뺄셈/초5_수학_분수의덧셈과뺄셈_01_분모가다른분수의덧셈_학생용.pptx
@@ -120,13 +120,13 @@
   <p:extLst>
     <p:ext uri="{521415D9-36F7-43E2-AB2F-B90AF26B5E84}">
       <p14:sectionLst xmlns:p14="http://schemas.microsoft.com/office/powerpoint/2010/main">
-        <p14:section name="도입" id="{c2d22fed-a61c-632e-0e30-136cdd7e8165}">
+        <p14:section name="도입" id="{fb10ef94-c272-b08b-6ad7-0d705d182402}">
           <p14:sldIdLst>
             <p14:sldId id="256"/>
             <p14:sldId id="257"/>
           </p14:sldIdLst>
         </p14:section>
-        <p14:section name="개념" id="{587c73f5-f8fc-0415-d3f8-aa0883e2542d}">
+        <p14:section name="개념" id="{5d49bd5e-f976-2764-25a5-1cc3c2f66415}">
           <p14:sldIdLst>
             <p14:sldId id="258"/>
             <p14:sldId id="259"/>
@@ -135,37 +135,37 @@
             <p14:sldId id="264"/>
           </p14:sldIdLst>
         </p14:section>
-        <p14:section name="연습" id="{575867a0-1f4d-b97d-7228-18eb4f43ff3a}">
+        <p14:section name="연습" id="{72779766-b5b0-e0d3-3a44-499e6cba69c1}">
           <p14:sldIdLst>
             <p14:sldId id="260"/>
             <p14:sldId id="262"/>
             <p14:sldId id="265"/>
           </p14:sldIdLst>
         </p14:section>
-        <p14:section name="개념" id="{47fac242-22dd-3a47-ae0c-d974fc5ef872}">
+        <p14:section name="개념" id="{579daeda-23ef-cde9-df4e-1b3d27ba930c}">
           <p14:sldIdLst/>
         </p14:section>
-        <p14:section name="연습" id="{c32381f2-689c-3bac-8121-1f8909bc9c41}">
+        <p14:section name="연습" id="{dac3e126-7749-3ae7-0775-d5330981e43c}">
           <p14:sldIdLst/>
         </p14:section>
-        <p14:section name="개념" id="{5b022c6b-1d55-8e6b-e1bb-e32c9d877cee}">
+        <p14:section name="개념" id="{99d06233-6161-8ac0-8cb3-a69715c855a3}">
           <p14:sldIdLst/>
         </p14:section>
-        <p14:section name="연습" id="{73b851d9-db9c-fdc6-a70e-e88758fe553b}">
+        <p14:section name="연습" id="{ff3c6ce9-928a-0b21-21e2-6daf164c84c7}">
           <p14:sldIdLst/>
         </p14:section>
-        <p14:section name="확인" id="{a522947b-cd4b-b37a-dc81-fb396b19311e}">
+        <p14:section name="확인" id="{97b339fb-2845-df29-b28f-23e75f0061e3}">
           <p14:sldIdLst>
             <p14:sldId id="266"/>
             <p14:sldId id="267"/>
           </p14:sldIdLst>
         </p14:section>
-        <p14:section name="정리" id="{cb73bd2d-99fe-30d7-1f5f-fbef192a8aa6}">
+        <p14:section name="정리" id="{20534a1e-4b25-466a-2663-89a3021a5f0c}">
           <p14:sldIdLst>
             <p14:sldId id="268"/>
           </p14:sldIdLst>
         </p14:section>
-        <p14:section name="보충" id="{c60bafa4-ca4a-7de0-1d16-9aae9c6e26ad}">
+        <p14:section name="보충" id="{b1894858-8eda-1e00-8ff6-a792d5b7d2ad}">
           <p14:sldIdLst>
             <p14:sldId id="269"/>
           </p14:sldIdLst>
